--- a/new-app/docs/Solution-Diagram.pptx
+++ b/new-app/docs/Solution-Diagram.pptx
@@ -4368,7 +4368,7 @@
               </a:rPr>
               <a:t>Plan number,
 pass/fail, QNEC,
-401(k) or 403(b)</a:t>
+401(k), 403(b), or 457</a:t>
             </a:r>
           </a:p>
         </p:txBody>
@@ -4460,8 +4460,8 @@
               </a:rPr>
               <a:t>Keep or remove
 Fill amounts
-Add bookmarks
-Optional date and HCE retype</a:t>
+Cover date and 402(g)
+HCE % only if checked</a:t>
             </a:r>
           </a:p>
         </p:txBody>
@@ -4553,7 +4553,8 @@
               </a:rPr>
               <a:t>Named PDF
 Email draft
-Assembly log</a:t>
+Assembly log
+unless a check stops it</a:t>
             </a:r>
           </a:p>
         </p:txBody>
@@ -4799,7 +4800,7 @@
                 </a:solidFill>
                 <a:latin typeface="Calibri"/>
               </a:rPr>
-              <a:t>Optional: if the source path is the Valuation Package folder, a copy is also saved in the Testing folder.</a:t>
+              <a:t>Assembly stops is on by default and does not save a failed package. A Valuation Package folder also saves a copy in the Testing folder.</a:t>
             </a:r>
           </a:p>
         </p:txBody>
@@ -5480,7 +5481,7 @@
                 </a:solidFill>
                 <a:latin typeface="Calibri"/>
               </a:rPr>
-              <a:t>Top heavy at 60% or more</a:t>
+              <a:t>Top heavy above 60%</a:t>
             </a:r>
           </a:p>
           <a:p>
@@ -6040,7 +6041,7 @@
                 </a:solidFill>
                 <a:latin typeface="Calibri"/>
               </a:rPr>
-              <a:t>403(b) bookmark is HCE</a:t>
+              <a:t>403(b): HCE bookmark, BRF kept</a:t>
             </a:r>
           </a:p>
         </p:txBody>
@@ -6130,7 +6131,7 @@
                 </a:solidFill>
                 <a:latin typeface="Calibri"/>
               </a:rPr>
-              <a:t>Cover day, HCE %, and off-calendar 402(g) dates change only when Retype dates and HCE % is checked. Non-PDF files are not converted.</a:t>
+              <a:t>Cover date and off-calendar 402(g) dates change on every Process. HCE % changes only when Retype 402(g) dates and HCE % is checked. A dropped non-PDF is not converted.</a:t>
             </a:r>
           </a:p>
         </p:txBody>
